--- a/how to install nonmem.pptx
+++ b/how to install nonmem.pptx
@@ -1064,7 +1064,13 @@
         <a:p>
           <a:r>
             <a:rPr lang="en-US"/>
-            <a:t>pirana_2.9.8_MacOSX.dmg</a:t>
+            <a:t>pirana_2.9.9_MacOSX.dmg</a:t>
+          </a:r>
+        </a:p>
+        <a:p>
+          <a:r>
+            <a:rPr lang="en-US" sz="1200"/>
+            <a:t>无限期学术版 license 可向 Certara 联系申请</a:t>
           </a:r>
         </a:p>
       </dgm:t>
@@ -1616,8 +1622,28 @@
             <a:buNone/>
           </a:pPr>
           <a:r>
-            <a:rPr lang="en-US" sz="1500" kern="1200"/>
-            <a:t>pirana_2.9.8_MacOSX.dmg</a:t>
+            <a:rPr lang="en-US" sz="1500" kern="1200">
+              <a:hlinkClick xmlns:r="http://schemas.openxmlformats.org/officeDocument/2006/relationships" r:id="rId11"/>
+            </a:rPr>
+            <a:t>pirana_2.9.9_MacOSX.dmg</a:t>
+          </a:r>
+        </a:p>
+        <a:p>
+          <a:pPr marL="0" lvl="0" indent="0" algn="l" defTabSz="666750">
+            <a:lnSpc>
+              <a:spcPct val="90000"/>
+            </a:lnSpc>
+            <a:spcBef>
+              <a:spcPct val="0"/>
+            </a:spcBef>
+            <a:spcAft>
+              <a:spcPct val="35000"/>
+            </a:spcAft>
+            <a:buNone/>
+          </a:pPr>
+          <a:r>
+            <a:rPr lang="en-US" sz="1200" kern="1200"/>
+            <a:t>无限期学术版 license 可向 Certara 联系申请</a:t>
           </a:r>
         </a:p>
       </dsp:txBody>
